--- a/ppt/IoTAI03-ESP32.pptx
+++ b/ppt/IoTAI03-ESP32.pptx
@@ -5,10 +5,10 @@
     <p:sldMasterId id="2147483653" r:id="rId1"/>
   </p:sldMasterIdLst>
   <p:notesMasterIdLst>
-    <p:notesMasterId r:id="rId16"/>
+    <p:notesMasterId r:id="rId13"/>
   </p:notesMasterIdLst>
   <p:handoutMasterIdLst>
-    <p:handoutMasterId r:id="rId17"/>
+    <p:handoutMasterId r:id="rId14"/>
   </p:handoutMasterIdLst>
   <p:sldIdLst>
     <p:sldId id="264" r:id="rId2"/>
@@ -19,12 +19,9 @@
     <p:sldId id="277" r:id="rId7"/>
     <p:sldId id="271" r:id="rId8"/>
     <p:sldId id="272" r:id="rId9"/>
-    <p:sldId id="266" r:id="rId10"/>
-    <p:sldId id="293" r:id="rId11"/>
-    <p:sldId id="265" r:id="rId12"/>
-    <p:sldId id="276" r:id="rId13"/>
-    <p:sldId id="291" r:id="rId14"/>
-    <p:sldId id="290" r:id="rId15"/>
+    <p:sldId id="294" r:id="rId10"/>
+    <p:sldId id="266" r:id="rId11"/>
+    <p:sldId id="293" r:id="rId12"/>
   </p:sldIdLst>
   <p:sldSz cx="9144000" cy="6858000" type="screen4x3"/>
   <p:notesSz cx="6648450" cy="9782175"/>
@@ -3704,10 +3701,10 @@
       </p:sp>
       <p:pic>
         <p:nvPicPr>
-          <p:cNvPr id="3" name="Image 2">
+          <p:cNvPr id="4" name="Image 3">
             <a:extLst>
               <a:ext uri="{FF2B5EF4-FFF2-40B4-BE49-F238E27FC236}">
-                <a16:creationId xmlns:a16="http://schemas.microsoft.com/office/drawing/2014/main" id="{70D987BA-6C35-AF8F-A365-245494B520D2}"/>
+                <a16:creationId xmlns:a16="http://schemas.microsoft.com/office/drawing/2014/main" id="{4146382E-7439-8FE7-6CAE-35D891B428D4}"/>
               </a:ext>
             </a:extLst>
           </p:cNvPr>
@@ -3724,8 +3721,8 @@
         </p:blipFill>
         <p:spPr>
           <a:xfrm>
-            <a:off x="3612544" y="2636912"/>
-            <a:ext cx="1918912" cy="3511855"/>
+            <a:off x="2433339" y="2819315"/>
+            <a:ext cx="4277322" cy="1219370"/>
           </a:xfrm>
           <a:prstGeom prst="rect">
             <a:avLst/>
@@ -3762,6 +3759,119 @@
           <p:cNvPr id="2" name="Titre 1">
             <a:extLst>
               <a:ext uri="{FF2B5EF4-FFF2-40B4-BE49-F238E27FC236}">
+                <a16:creationId xmlns:a16="http://schemas.microsoft.com/office/drawing/2014/main" id="{8B17D6C2-4C06-83C1-878A-ED00C25F0AF5}"/>
+              </a:ext>
+            </a:extLst>
+          </p:cNvPr>
+          <p:cNvSpPr>
+            <a:spLocks noGrp="1"/>
+          </p:cNvSpPr>
+          <p:nvPr>
+            <p:ph type="title"/>
+          </p:nvPr>
+        </p:nvSpPr>
+        <p:spPr/>
+        <p:txBody>
+          <a:bodyPr/>
+          <a:lstStyle/>
+          <a:p>
+            <a:r>
+              <a:rPr lang="fr-FR" dirty="0"/>
+              <a:t>GPIO</a:t>
+            </a:r>
+          </a:p>
+        </p:txBody>
+      </p:sp>
+      <p:sp>
+        <p:nvSpPr>
+          <p:cNvPr id="3" name="Espace réservé du contenu 2">
+            <a:extLst>
+              <a:ext uri="{FF2B5EF4-FFF2-40B4-BE49-F238E27FC236}">
+                <a16:creationId xmlns:a16="http://schemas.microsoft.com/office/drawing/2014/main" id="{FF880FA4-90EB-82EE-AB48-C87B5633E499}"/>
+              </a:ext>
+            </a:extLst>
+          </p:cNvPr>
+          <p:cNvSpPr>
+            <a:spLocks noGrp="1"/>
+          </p:cNvSpPr>
+          <p:nvPr>
+            <p:ph idx="1"/>
+          </p:nvPr>
+        </p:nvSpPr>
+        <p:spPr/>
+        <p:txBody>
+          <a:bodyPr/>
+          <a:lstStyle/>
+          <a:p>
+            <a:endParaRPr lang="fr-FR"/>
+          </a:p>
+        </p:txBody>
+      </p:sp>
+      <p:pic>
+        <p:nvPicPr>
+          <p:cNvPr id="5" name="Image 4">
+            <a:extLst>
+              <a:ext uri="{FF2B5EF4-FFF2-40B4-BE49-F238E27FC236}">
+                <a16:creationId xmlns:a16="http://schemas.microsoft.com/office/drawing/2014/main" id="{06151C27-EEDF-24CA-DA69-208CDFEE19DA}"/>
+              </a:ext>
+            </a:extLst>
+          </p:cNvPr>
+          <p:cNvPicPr>
+            <a:picLocks noChangeAspect="1"/>
+          </p:cNvPicPr>
+          <p:nvPr/>
+        </p:nvPicPr>
+        <p:blipFill>
+          <a:blip r:embed="rId2"/>
+          <a:stretch>
+            <a:fillRect/>
+          </a:stretch>
+        </p:blipFill>
+        <p:spPr>
+          <a:xfrm>
+            <a:off x="0" y="980728"/>
+            <a:ext cx="9144000" cy="5557484"/>
+          </a:xfrm>
+          <a:prstGeom prst="rect">
+            <a:avLst/>
+          </a:prstGeom>
+        </p:spPr>
+      </p:pic>
+    </p:spTree>
+    <p:extLst>
+      <p:ext uri="{BB962C8B-B14F-4D97-AF65-F5344CB8AC3E}">
+        <p14:creationId xmlns:p14="http://schemas.microsoft.com/office/powerpoint/2010/main" val="1376953527"/>
+      </p:ext>
+    </p:extLst>
+  </p:cSld>
+  <p:clrMapOvr>
+    <a:masterClrMapping/>
+  </p:clrMapOvr>
+</p:sld>
+</file>
+
+<file path=ppt/slides/slide11.xml><?xml version="1.0" encoding="utf-8"?>
+<p:sld xmlns:a="http://schemas.openxmlformats.org/drawingml/2006/main" xmlns:r="http://schemas.openxmlformats.org/officeDocument/2006/relationships" xmlns:p="http://schemas.openxmlformats.org/presentationml/2006/main">
+  <p:cSld>
+    <p:spTree>
+      <p:nvGrpSpPr>
+        <p:cNvPr id="1" name=""/>
+        <p:cNvGrpSpPr/>
+        <p:nvPr/>
+      </p:nvGrpSpPr>
+      <p:grpSpPr>
+        <a:xfrm>
+          <a:off x="0" y="0"/>
+          <a:ext cx="0" cy="0"/>
+          <a:chOff x="0" y="0"/>
+          <a:chExt cx="0" cy="0"/>
+        </a:xfrm>
+      </p:grpSpPr>
+      <p:sp>
+        <p:nvSpPr>
+          <p:cNvPr id="2" name="Titre 1">
+            <a:extLst>
+              <a:ext uri="{FF2B5EF4-FFF2-40B4-BE49-F238E27FC236}">
                 <a16:creationId xmlns:a16="http://schemas.microsoft.com/office/drawing/2014/main" id="{EB761F1F-0979-0559-7A6C-F68EEE5B088A}"/>
               </a:ext>
             </a:extLst>
@@ -3847,554 +3957,6 @@
     <p:extLst>
       <p:ext uri="{BB962C8B-B14F-4D97-AF65-F5344CB8AC3E}">
         <p14:creationId xmlns:p14="http://schemas.microsoft.com/office/powerpoint/2010/main" val="4066030915"/>
-      </p:ext>
-    </p:extLst>
-  </p:cSld>
-  <p:clrMapOvr>
-    <a:masterClrMapping/>
-  </p:clrMapOvr>
-</p:sld>
-</file>
-
-<file path=ppt/slides/slide11.xml><?xml version="1.0" encoding="utf-8"?>
-<p:sld xmlns:a="http://schemas.openxmlformats.org/drawingml/2006/main" xmlns:r="http://schemas.openxmlformats.org/officeDocument/2006/relationships" xmlns:p="http://schemas.openxmlformats.org/presentationml/2006/main">
-  <p:cSld>
-    <p:spTree>
-      <p:nvGrpSpPr>
-        <p:cNvPr id="1" name=""/>
-        <p:cNvGrpSpPr/>
-        <p:nvPr/>
-      </p:nvGrpSpPr>
-      <p:grpSpPr>
-        <a:xfrm>
-          <a:off x="0" y="0"/>
-          <a:ext cx="0" cy="0"/>
-          <a:chOff x="0" y="0"/>
-          <a:chExt cx="0" cy="0"/>
-        </a:xfrm>
-      </p:grpSpPr>
-      <p:sp>
-        <p:nvSpPr>
-          <p:cNvPr id="2" name="Titre 1">
-            <a:extLst>
-              <a:ext uri="{FF2B5EF4-FFF2-40B4-BE49-F238E27FC236}">
-                <a16:creationId xmlns:a16="http://schemas.microsoft.com/office/drawing/2014/main" id="{C5AF430F-F6A1-1B4A-8B5B-5B45861D7AE7}"/>
-              </a:ext>
-            </a:extLst>
-          </p:cNvPr>
-          <p:cNvSpPr>
-            <a:spLocks noGrp="1"/>
-          </p:cNvSpPr>
-          <p:nvPr>
-            <p:ph type="title"/>
-          </p:nvPr>
-        </p:nvSpPr>
-        <p:spPr/>
-        <p:txBody>
-          <a:bodyPr/>
-          <a:lstStyle/>
-          <a:p>
-            <a:r>
-              <a:rPr lang="fr-FR" dirty="0"/>
-              <a:t>Arduino Studio</a:t>
-            </a:r>
-          </a:p>
-        </p:txBody>
-      </p:sp>
-      <p:sp>
-        <p:nvSpPr>
-          <p:cNvPr id="3" name="Espace réservé du contenu 2">
-            <a:extLst>
-              <a:ext uri="{FF2B5EF4-FFF2-40B4-BE49-F238E27FC236}">
-                <a16:creationId xmlns:a16="http://schemas.microsoft.com/office/drawing/2014/main" id="{689478DD-FAA2-D985-BE1B-1F13FF844608}"/>
-              </a:ext>
-            </a:extLst>
-          </p:cNvPr>
-          <p:cNvSpPr>
-            <a:spLocks noGrp="1"/>
-          </p:cNvSpPr>
-          <p:nvPr>
-            <p:ph idx="1"/>
-          </p:nvPr>
-        </p:nvSpPr>
-        <p:spPr>
-          <a:xfrm>
-            <a:off x="179513" y="1412776"/>
-            <a:ext cx="6408712" cy="5040560"/>
-          </a:xfrm>
-        </p:spPr>
-        <p:txBody>
-          <a:bodyPr/>
-          <a:lstStyle/>
-          <a:p>
-            <a:r>
-              <a:rPr lang="fr-FR" dirty="0"/>
-              <a:t>Ce paramètre facilement dans Arduino Studio</a:t>
-            </a:r>
-          </a:p>
-          <a:p>
-            <a:pPr lvl="1"/>
-            <a:r>
-              <a:rPr lang="fr-FR" dirty="0" err="1"/>
-              <a:t>Board</a:t>
-            </a:r>
-            <a:r>
-              <a:rPr lang="fr-FR" dirty="0"/>
-              <a:t> manager</a:t>
-            </a:r>
-          </a:p>
-          <a:p>
-            <a:pPr lvl="1"/>
-            <a:r>
-              <a:rPr lang="fr-FR" dirty="0"/>
-              <a:t>ESP32 by </a:t>
-            </a:r>
-            <a:r>
-              <a:rPr lang="fr-FR" dirty="0" err="1"/>
-              <a:t>Espressif</a:t>
-            </a:r>
-            <a:endParaRPr lang="fr-FR" dirty="0"/>
-          </a:p>
-        </p:txBody>
-      </p:sp>
-      <p:pic>
-        <p:nvPicPr>
-          <p:cNvPr id="6" name="Image 5">
-            <a:extLst>
-              <a:ext uri="{FF2B5EF4-FFF2-40B4-BE49-F238E27FC236}">
-                <a16:creationId xmlns:a16="http://schemas.microsoft.com/office/drawing/2014/main" id="{12CF981E-E7C7-8650-D437-8EE4BB34AB08}"/>
-              </a:ext>
-            </a:extLst>
-          </p:cNvPr>
-          <p:cNvPicPr>
-            <a:picLocks noChangeAspect="1"/>
-          </p:cNvPicPr>
-          <p:nvPr/>
-        </p:nvPicPr>
-        <p:blipFill>
-          <a:blip r:embed="rId2"/>
-          <a:stretch>
-            <a:fillRect/>
-          </a:stretch>
-        </p:blipFill>
-        <p:spPr>
-          <a:xfrm>
-            <a:off x="6588224" y="1317868"/>
-            <a:ext cx="2724530" cy="5544324"/>
-          </a:xfrm>
-          <a:prstGeom prst="rect">
-            <a:avLst/>
-          </a:prstGeom>
-        </p:spPr>
-      </p:pic>
-    </p:spTree>
-    <p:extLst>
-      <p:ext uri="{BB962C8B-B14F-4D97-AF65-F5344CB8AC3E}">
-        <p14:creationId xmlns:p14="http://schemas.microsoft.com/office/powerpoint/2010/main" val="3126085762"/>
-      </p:ext>
-    </p:extLst>
-  </p:cSld>
-  <p:clrMapOvr>
-    <a:masterClrMapping/>
-  </p:clrMapOvr>
-</p:sld>
-</file>
-
-<file path=ppt/slides/slide12.xml><?xml version="1.0" encoding="utf-8"?>
-<p:sld xmlns:a="http://schemas.openxmlformats.org/drawingml/2006/main" xmlns:r="http://schemas.openxmlformats.org/officeDocument/2006/relationships" xmlns:p="http://schemas.openxmlformats.org/presentationml/2006/main">
-  <p:cSld>
-    <p:spTree>
-      <p:nvGrpSpPr>
-        <p:cNvPr id="1" name=""/>
-        <p:cNvGrpSpPr/>
-        <p:nvPr/>
-      </p:nvGrpSpPr>
-      <p:grpSpPr>
-        <a:xfrm>
-          <a:off x="0" y="0"/>
-          <a:ext cx="0" cy="0"/>
-          <a:chOff x="0" y="0"/>
-          <a:chExt cx="0" cy="0"/>
-        </a:xfrm>
-      </p:grpSpPr>
-      <p:sp>
-        <p:nvSpPr>
-          <p:cNvPr id="2" name="Titre 1">
-            <a:extLst>
-              <a:ext uri="{FF2B5EF4-FFF2-40B4-BE49-F238E27FC236}">
-                <a16:creationId xmlns:a16="http://schemas.microsoft.com/office/drawing/2014/main" id="{6CC916DA-0DDA-76AB-84F1-273678146802}"/>
-              </a:ext>
-            </a:extLst>
-          </p:cNvPr>
-          <p:cNvSpPr>
-            <a:spLocks noGrp="1"/>
-          </p:cNvSpPr>
-          <p:nvPr>
-            <p:ph type="title"/>
-          </p:nvPr>
-        </p:nvSpPr>
-        <p:spPr/>
-        <p:txBody>
-          <a:bodyPr/>
-          <a:lstStyle/>
-          <a:p>
-            <a:r>
-              <a:rPr lang="fr-FR" dirty="0"/>
-              <a:t>Arduino Studio</a:t>
-            </a:r>
-          </a:p>
-        </p:txBody>
-      </p:sp>
-      <p:sp>
-        <p:nvSpPr>
-          <p:cNvPr id="3" name="Espace réservé du contenu 2">
-            <a:extLst>
-              <a:ext uri="{FF2B5EF4-FFF2-40B4-BE49-F238E27FC236}">
-                <a16:creationId xmlns:a16="http://schemas.microsoft.com/office/drawing/2014/main" id="{E2292EA5-ADB6-1FD4-6115-875CFB107A86}"/>
-              </a:ext>
-            </a:extLst>
-          </p:cNvPr>
-          <p:cNvSpPr>
-            <a:spLocks noGrp="1"/>
-          </p:cNvSpPr>
-          <p:nvPr>
-            <p:ph idx="1"/>
-          </p:nvPr>
-        </p:nvSpPr>
-        <p:spPr/>
-        <p:txBody>
-          <a:bodyPr/>
-          <a:lstStyle/>
-          <a:p>
-            <a:r>
-              <a:rPr lang="fr-FR" dirty="0"/>
-              <a:t>Le </a:t>
-            </a:r>
-            <a:r>
-              <a:rPr lang="fr-FR" dirty="0" err="1"/>
-              <a:t>SoC</a:t>
-            </a:r>
-            <a:r>
-              <a:rPr lang="fr-FR" dirty="0"/>
-              <a:t> utilisé pendant la formation est le ESP32-WROOM-DA-Module</a:t>
-            </a:r>
-          </a:p>
-        </p:txBody>
-      </p:sp>
-      <p:pic>
-        <p:nvPicPr>
-          <p:cNvPr id="6" name="Image 5">
-            <a:extLst>
-              <a:ext uri="{FF2B5EF4-FFF2-40B4-BE49-F238E27FC236}">
-                <a16:creationId xmlns:a16="http://schemas.microsoft.com/office/drawing/2014/main" id="{5F6D809B-03B8-EF58-4287-E515A580AB4A}"/>
-              </a:ext>
-            </a:extLst>
-          </p:cNvPr>
-          <p:cNvPicPr>
-            <a:picLocks noChangeAspect="1"/>
-          </p:cNvPicPr>
-          <p:nvPr/>
-        </p:nvPicPr>
-        <p:blipFill>
-          <a:blip r:embed="rId2"/>
-          <a:stretch>
-            <a:fillRect/>
-          </a:stretch>
-        </p:blipFill>
-        <p:spPr>
-          <a:xfrm>
-            <a:off x="1259632" y="2386433"/>
-            <a:ext cx="6264696" cy="4471567"/>
-          </a:xfrm>
-          <a:prstGeom prst="rect">
-            <a:avLst/>
-          </a:prstGeom>
-        </p:spPr>
-      </p:pic>
-    </p:spTree>
-    <p:extLst>
-      <p:ext uri="{BB962C8B-B14F-4D97-AF65-F5344CB8AC3E}">
-        <p14:creationId xmlns:p14="http://schemas.microsoft.com/office/powerpoint/2010/main" val="3137703711"/>
-      </p:ext>
-    </p:extLst>
-  </p:cSld>
-  <p:clrMapOvr>
-    <a:masterClrMapping/>
-  </p:clrMapOvr>
-</p:sld>
-</file>
-
-<file path=ppt/slides/slide13.xml><?xml version="1.0" encoding="utf-8"?>
-<p:sld xmlns:a="http://schemas.openxmlformats.org/drawingml/2006/main" xmlns:r="http://schemas.openxmlformats.org/officeDocument/2006/relationships" xmlns:p="http://schemas.openxmlformats.org/presentationml/2006/main">
-  <p:cSld>
-    <p:spTree>
-      <p:nvGrpSpPr>
-        <p:cNvPr id="1" name=""/>
-        <p:cNvGrpSpPr/>
-        <p:nvPr/>
-      </p:nvGrpSpPr>
-      <p:grpSpPr>
-        <a:xfrm>
-          <a:off x="0" y="0"/>
-          <a:ext cx="0" cy="0"/>
-          <a:chOff x="0" y="0"/>
-          <a:chExt cx="0" cy="0"/>
-        </a:xfrm>
-      </p:grpSpPr>
-      <p:sp>
-        <p:nvSpPr>
-          <p:cNvPr id="2" name="Titre 1">
-            <a:extLst>
-              <a:ext uri="{FF2B5EF4-FFF2-40B4-BE49-F238E27FC236}">
-                <a16:creationId xmlns:a16="http://schemas.microsoft.com/office/drawing/2014/main" id="{3E903FFC-CB90-5213-9085-2F08AB02C474}"/>
-              </a:ext>
-            </a:extLst>
-          </p:cNvPr>
-          <p:cNvSpPr>
-            <a:spLocks noGrp="1"/>
-          </p:cNvSpPr>
-          <p:nvPr>
-            <p:ph type="title"/>
-          </p:nvPr>
-        </p:nvSpPr>
-        <p:spPr/>
-        <p:txBody>
-          <a:bodyPr/>
-          <a:lstStyle/>
-          <a:p>
-            <a:r>
-              <a:rPr lang="fr-FR" dirty="0" err="1"/>
-              <a:t>Bread</a:t>
-            </a:r>
-            <a:r>
-              <a:rPr lang="fr-FR" dirty="0"/>
-              <a:t> </a:t>
-            </a:r>
-            <a:r>
-              <a:rPr lang="fr-FR" dirty="0" err="1"/>
-              <a:t>Board</a:t>
-            </a:r>
-            <a:endParaRPr lang="fr-FR" dirty="0"/>
-          </a:p>
-        </p:txBody>
-      </p:sp>
-      <p:sp>
-        <p:nvSpPr>
-          <p:cNvPr id="3" name="Espace réservé du contenu 2">
-            <a:extLst>
-              <a:ext uri="{FF2B5EF4-FFF2-40B4-BE49-F238E27FC236}">
-                <a16:creationId xmlns:a16="http://schemas.microsoft.com/office/drawing/2014/main" id="{225445D6-2FAD-E126-EA73-7DDEEB6C021A}"/>
-              </a:ext>
-            </a:extLst>
-          </p:cNvPr>
-          <p:cNvSpPr>
-            <a:spLocks noGrp="1"/>
-          </p:cNvSpPr>
-          <p:nvPr>
-            <p:ph idx="1"/>
-          </p:nvPr>
-        </p:nvSpPr>
-        <p:spPr/>
-        <p:txBody>
-          <a:bodyPr/>
-          <a:lstStyle/>
-          <a:p>
-            <a:endParaRPr lang="fr-FR" dirty="0"/>
-          </a:p>
-          <a:p>
-            <a:endParaRPr lang="fr-FR" dirty="0"/>
-          </a:p>
-          <a:p>
-            <a:endParaRPr lang="fr-FR" dirty="0"/>
-          </a:p>
-          <a:p>
-            <a:endParaRPr lang="fr-FR" dirty="0"/>
-          </a:p>
-          <a:p>
-            <a:pPr marL="0" indent="0">
-              <a:buNone/>
-            </a:pPr>
-            <a:endParaRPr lang="fr-FR" dirty="0"/>
-          </a:p>
-        </p:txBody>
-      </p:sp>
-      <p:pic>
-        <p:nvPicPr>
-          <p:cNvPr id="7" name="Image 6">
-            <a:extLst>
-              <a:ext uri="{FF2B5EF4-FFF2-40B4-BE49-F238E27FC236}">
-                <a16:creationId xmlns:a16="http://schemas.microsoft.com/office/drawing/2014/main" id="{003467BC-A008-CD54-71E4-8E0F97C603A2}"/>
-              </a:ext>
-            </a:extLst>
-          </p:cNvPr>
-          <p:cNvPicPr>
-            <a:picLocks noChangeAspect="1"/>
-          </p:cNvPicPr>
-          <p:nvPr/>
-        </p:nvPicPr>
-        <p:blipFill>
-          <a:blip r:embed="rId2"/>
-          <a:stretch>
-            <a:fillRect/>
-          </a:stretch>
-        </p:blipFill>
-        <p:spPr>
-          <a:xfrm>
-            <a:off x="608958" y="1556792"/>
-            <a:ext cx="7926083" cy="4278354"/>
-          </a:xfrm>
-          <a:prstGeom prst="rect">
-            <a:avLst/>
-          </a:prstGeom>
-        </p:spPr>
-      </p:pic>
-    </p:spTree>
-    <p:extLst>
-      <p:ext uri="{BB962C8B-B14F-4D97-AF65-F5344CB8AC3E}">
-        <p14:creationId xmlns:p14="http://schemas.microsoft.com/office/powerpoint/2010/main" val="1795508536"/>
-      </p:ext>
-    </p:extLst>
-  </p:cSld>
-  <p:clrMapOvr>
-    <a:masterClrMapping/>
-  </p:clrMapOvr>
-</p:sld>
-</file>
-
-<file path=ppt/slides/slide14.xml><?xml version="1.0" encoding="utf-8"?>
-<p:sld xmlns:a="http://schemas.openxmlformats.org/drawingml/2006/main" xmlns:r="http://schemas.openxmlformats.org/officeDocument/2006/relationships" xmlns:p="http://schemas.openxmlformats.org/presentationml/2006/main">
-  <p:cSld>
-    <p:spTree>
-      <p:nvGrpSpPr>
-        <p:cNvPr id="1" name=""/>
-        <p:cNvGrpSpPr/>
-        <p:nvPr/>
-      </p:nvGrpSpPr>
-      <p:grpSpPr>
-        <a:xfrm>
-          <a:off x="0" y="0"/>
-          <a:ext cx="0" cy="0"/>
-          <a:chOff x="0" y="0"/>
-          <a:chExt cx="0" cy="0"/>
-        </a:xfrm>
-      </p:grpSpPr>
-      <p:sp>
-        <p:nvSpPr>
-          <p:cNvPr id="2" name="Titre 1">
-            <a:extLst>
-              <a:ext uri="{FF2B5EF4-FFF2-40B4-BE49-F238E27FC236}">
-                <a16:creationId xmlns:a16="http://schemas.microsoft.com/office/drawing/2014/main" id="{A91CD0F0-78E8-2239-1DF8-7245077B1C62}"/>
-              </a:ext>
-            </a:extLst>
-          </p:cNvPr>
-          <p:cNvSpPr>
-            <a:spLocks noGrp="1"/>
-          </p:cNvSpPr>
-          <p:nvPr>
-            <p:ph type="title"/>
-          </p:nvPr>
-        </p:nvSpPr>
-        <p:spPr/>
-        <p:txBody>
-          <a:bodyPr/>
-          <a:lstStyle/>
-          <a:p>
-            <a:r>
-              <a:rPr lang="fr-FR" dirty="0"/>
-              <a:t>Industrialisation</a:t>
-            </a:r>
-          </a:p>
-        </p:txBody>
-      </p:sp>
-      <p:sp>
-        <p:nvSpPr>
-          <p:cNvPr id="3" name="Espace réservé du contenu 2">
-            <a:extLst>
-              <a:ext uri="{FF2B5EF4-FFF2-40B4-BE49-F238E27FC236}">
-                <a16:creationId xmlns:a16="http://schemas.microsoft.com/office/drawing/2014/main" id="{0F3837FF-182B-C092-741B-DCB40FF0CB42}"/>
-              </a:ext>
-            </a:extLst>
-          </p:cNvPr>
-          <p:cNvSpPr>
-            <a:spLocks noGrp="1"/>
-          </p:cNvSpPr>
-          <p:nvPr>
-            <p:ph idx="1"/>
-          </p:nvPr>
-        </p:nvSpPr>
-        <p:spPr/>
-        <p:txBody>
-          <a:bodyPr/>
-          <a:lstStyle/>
-          <a:p>
-            <a:endParaRPr lang="fr-FR" dirty="0"/>
-          </a:p>
-        </p:txBody>
-      </p:sp>
-      <p:pic>
-        <p:nvPicPr>
-          <p:cNvPr id="5" name="Image 4">
-            <a:extLst>
-              <a:ext uri="{FF2B5EF4-FFF2-40B4-BE49-F238E27FC236}">
-                <a16:creationId xmlns:a16="http://schemas.microsoft.com/office/drawing/2014/main" id="{9D86BE4C-A787-528F-3818-FC4E5DF8035C}"/>
-              </a:ext>
-            </a:extLst>
-          </p:cNvPr>
-          <p:cNvPicPr>
-            <a:picLocks noChangeAspect="1"/>
-          </p:cNvPicPr>
-          <p:nvPr/>
-        </p:nvPicPr>
-        <p:blipFill>
-          <a:blip r:embed="rId2"/>
-          <a:stretch>
-            <a:fillRect/>
-          </a:stretch>
-        </p:blipFill>
-        <p:spPr>
-          <a:xfrm>
-            <a:off x="4829574" y="1710922"/>
-            <a:ext cx="3553321" cy="3905795"/>
-          </a:xfrm>
-          <a:prstGeom prst="rect">
-            <a:avLst/>
-          </a:prstGeom>
-        </p:spPr>
-      </p:pic>
-      <p:pic>
-        <p:nvPicPr>
-          <p:cNvPr id="7" name="Image 6">
-            <a:extLst>
-              <a:ext uri="{FF2B5EF4-FFF2-40B4-BE49-F238E27FC236}">
-                <a16:creationId xmlns:a16="http://schemas.microsoft.com/office/drawing/2014/main" id="{B8DE2B5D-04C0-BEA2-8B87-8DFB9E91C232}"/>
-              </a:ext>
-            </a:extLst>
-          </p:cNvPr>
-          <p:cNvPicPr>
-            <a:picLocks noChangeAspect="1"/>
-          </p:cNvPicPr>
-          <p:nvPr/>
-        </p:nvPicPr>
-        <p:blipFill>
-          <a:blip r:embed="rId3"/>
-          <a:stretch>
-            <a:fillRect/>
-          </a:stretch>
-        </p:blipFill>
-        <p:spPr>
-          <a:xfrm>
-            <a:off x="0" y="2060848"/>
-            <a:ext cx="4673726" cy="3205945"/>
-          </a:xfrm>
-          <a:prstGeom prst="rect">
-            <a:avLst/>
-          </a:prstGeom>
-        </p:spPr>
-      </p:pic>
-    </p:spTree>
-    <p:extLst>
-      <p:ext uri="{BB962C8B-B14F-4D97-AF65-F5344CB8AC3E}">
-        <p14:creationId xmlns:p14="http://schemas.microsoft.com/office/powerpoint/2010/main" val="1828250498"/>
       </p:ext>
     </p:extLst>
   </p:cSld>
@@ -5519,7 +5081,7 @@
           <p:cNvPr id="2" name="Titre 1">
             <a:extLst>
               <a:ext uri="{FF2B5EF4-FFF2-40B4-BE49-F238E27FC236}">
-                <a16:creationId xmlns:a16="http://schemas.microsoft.com/office/drawing/2014/main" id="{8B17D6C2-4C06-83C1-878A-ED00C25F0AF5}"/>
+                <a16:creationId xmlns:a16="http://schemas.microsoft.com/office/drawing/2014/main" id="{FF6DD792-845F-832E-9A2C-C188B2B5BAE0}"/>
               </a:ext>
             </a:extLst>
           </p:cNvPr>
@@ -5536,9 +5098,10 @@
           <a:lstStyle/>
           <a:p>
             <a:r>
-              <a:rPr lang="fr-FR" dirty="0"/>
-              <a:t>GPIO</a:t>
-            </a:r>
+              <a:rPr lang="fr-FR" dirty="0" err="1"/>
+              <a:t>Wrover</a:t>
+            </a:r>
+            <a:endParaRPr lang="fr-FR" dirty="0"/>
           </a:p>
         </p:txBody>
       </p:sp>
@@ -5547,7 +5110,7 @@
           <p:cNvPr id="3" name="Espace réservé du contenu 2">
             <a:extLst>
               <a:ext uri="{FF2B5EF4-FFF2-40B4-BE49-F238E27FC236}">
-                <a16:creationId xmlns:a16="http://schemas.microsoft.com/office/drawing/2014/main" id="{FF880FA4-90EB-82EE-AB48-C87B5633E499}"/>
+                <a16:creationId xmlns:a16="http://schemas.microsoft.com/office/drawing/2014/main" id="{ECFF02EE-B37A-C034-365E-312A282D89C5}"/>
               </a:ext>
             </a:extLst>
           </p:cNvPr>
@@ -5563,16 +5126,25 @@
           <a:bodyPr/>
           <a:lstStyle/>
           <a:p>
-            <a:endParaRPr lang="fr-FR"/>
+            <a:r>
+              <a:rPr lang="fr-FR" dirty="0"/>
+              <a:t>4 Mo RAM</a:t>
+            </a:r>
+          </a:p>
+          <a:p>
+            <a:r>
+              <a:rPr lang="fr-FR" dirty="0"/>
+              <a:t>Camera</a:t>
+            </a:r>
           </a:p>
         </p:txBody>
       </p:sp>
       <p:pic>
         <p:nvPicPr>
-          <p:cNvPr id="5" name="Image 4">
+          <p:cNvPr id="9" name="Image 8">
             <a:extLst>
               <a:ext uri="{FF2B5EF4-FFF2-40B4-BE49-F238E27FC236}">
-                <a16:creationId xmlns:a16="http://schemas.microsoft.com/office/drawing/2014/main" id="{06151C27-EEDF-24CA-DA69-208CDFEE19DA}"/>
+                <a16:creationId xmlns:a16="http://schemas.microsoft.com/office/drawing/2014/main" id="{08ECA798-C6FD-A933-7405-0BAA15B96D66}"/>
               </a:ext>
             </a:extLst>
           </p:cNvPr>
@@ -5589,8 +5161,8 @@
         </p:blipFill>
         <p:spPr>
           <a:xfrm>
-            <a:off x="0" y="980728"/>
-            <a:ext cx="9144000" cy="5557484"/>
+            <a:off x="2843808" y="1556792"/>
+            <a:ext cx="5725324" cy="3200847"/>
           </a:xfrm>
           <a:prstGeom prst="rect">
             <a:avLst/>
@@ -5600,7 +5172,7 @@
     </p:spTree>
     <p:extLst>
       <p:ext uri="{BB962C8B-B14F-4D97-AF65-F5344CB8AC3E}">
-        <p14:creationId xmlns:p14="http://schemas.microsoft.com/office/powerpoint/2010/main" val="1376953527"/>
+        <p14:creationId xmlns:p14="http://schemas.microsoft.com/office/powerpoint/2010/main" val="2381402599"/>
       </p:ext>
     </p:extLst>
   </p:cSld>
